--- a/corpus/pptx/deck-slide-order.pptx
+++ b/corpus/pptx/deck-slide-order.pptx
@@ -74,7 +74,7 @@
         <p:txBody>
           <a:bodyPr/>
           <a:p>
-            <a:fld id="{3A3EE092-392D-421B-83F2-52D5E61C9CDF}" type="slidenum">
+            <a:fld id="{64952142-E281-4C3C-A018-4B3875669566}" type="slidenum">
               <a:t>&lt;#&gt;</a:t>
             </a:fld>
           </a:p>
@@ -125,7 +125,7 @@
       </p:grpSpPr>
       <p:sp>
         <p:nvSpPr>
-          <p:cNvPr id="7" name="PlaceHolder 1"/>
+          <p:cNvPr id="5" name="PlaceHolder 1"/>
           <p:cNvSpPr>
             <a:spLocks noGrp="1"/>
           </p:cNvSpPr>
@@ -147,27 +147,25 @@
           </a:ln>
         </p:spPr>
         <p:txBody>
-          <a:bodyPr lIns="0" tIns="0" rIns="0" bIns="0" anchor="ctr">
-            <a:spAutoFit/>
+          <a:bodyPr lIns="0" rIns="0" tIns="0" bIns="0" anchor="ctr">
+            <a:noAutofit/>
           </a:bodyPr>
           <a:p>
             <a:pPr indent="0" algn="ctr">
               <a:buNone/>
             </a:pPr>
-            <a:endParaRPr lang="en-US" sz="4400" b="0" u="none" strike="noStrike">
-              <a:solidFill>
-                <a:srgbClr val="000000"/>
-              </a:solidFill>
-              <a:effectLst/>
-              <a:uFillTx/>
-              <a:latin typeface="Arial"/>
-            </a:endParaRPr>
-          </a:p>
-        </p:txBody>
-      </p:sp>
-      <p:sp>
-        <p:nvSpPr>
-          <p:cNvPr id="8" name="PlaceHolder 2"/>
+            <a:endParaRPr b="0" lang="en-US" sz="4400" spc="-1" strike="noStrike">
+              <a:solidFill>
+                <a:srgbClr val="000000"/>
+              </a:solidFill>
+              <a:latin typeface="Arial"/>
+            </a:endParaRPr>
+          </a:p>
+        </p:txBody>
+      </p:sp>
+      <p:sp>
+        <p:nvSpPr>
+          <p:cNvPr id="6" name="PlaceHolder 2"/>
           <p:cNvSpPr>
             <a:spLocks noGrp="1"/>
           </p:cNvSpPr>
@@ -189,19 +187,17 @@
           </a:ln>
         </p:spPr>
         <p:txBody>
-          <a:bodyPr lIns="0" tIns="0" rIns="0" bIns="0" anchor="ctr">
-            <a:spAutoFit/>
+          <a:bodyPr lIns="0" rIns="0" tIns="0" bIns="0" anchor="ctr">
+            <a:noAutofit/>
           </a:bodyPr>
           <a:p>
             <a:pPr indent="0" algn="ctr">
               <a:buNone/>
             </a:pPr>
-            <a:endParaRPr lang="en-US" sz="3200" b="0" u="none" strike="noStrike">
-              <a:solidFill>
-                <a:srgbClr val="000000"/>
-              </a:solidFill>
-              <a:effectLst/>
-              <a:uFillTx/>
+            <a:endParaRPr b="0" lang="en-US" sz="3200" spc="-1" strike="noStrike">
+              <a:solidFill>
+                <a:srgbClr val="000000"/>
+              </a:solidFill>
               <a:latin typeface="Arial"/>
             </a:endParaRPr>
           </a:p>
@@ -241,7 +237,7 @@
         <p:txBody>
           <a:bodyPr/>
           <a:p>
-            <a:fld id="{CD7FB590-426C-462A-8121-4ED8134555B5}" type="slidenum">
+            <a:fld id="{78D9586D-2392-43F3-8A3C-4303C77D9167}" type="slidenum">
               <a:t>&lt;#&gt;</a:t>
             </a:fld>
           </a:p>
@@ -292,7 +288,7 @@
       </p:grpSpPr>
       <p:sp>
         <p:nvSpPr>
-          <p:cNvPr id="2" name="PlaceHolder 1"/>
+          <p:cNvPr id="0" name="PlaceHolder 1"/>
           <p:cNvSpPr>
             <a:spLocks noGrp="1"/>
           </p:cNvSpPr>
@@ -314,51 +310,34 @@
           </a:ln>
         </p:spPr>
         <p:txBody>
-          <a:bodyPr lIns="0" tIns="0" rIns="0" bIns="0" anchor="ctr">
-            <a:noAutofit/>
-          </a:bodyPr>
-          <a:lstStyle>
-            <a:lvl1pPr indent="0" algn="ctr">
-              <a:buNone/>
-              <a:defRPr lang="en-US" sz="4400" b="0" u="none" strike="noStrike">
-                <a:solidFill>
-                  <a:srgbClr val="000000"/>
-                </a:solidFill>
-                <a:effectLst/>
-                <a:uFillTx/>
-                <a:latin typeface="Arial"/>
-              </a:defRPr>
-            </a:lvl1pPr>
-          </a:lstStyle>
+          <a:bodyPr lIns="0" rIns="0" tIns="0" bIns="0" anchor="ctr">
+            <a:noAutofit/>
+          </a:bodyPr>
           <a:p>
             <a:pPr indent="0" algn="ctr">
               <a:buNone/>
             </a:pPr>
             <a:r>
-              <a:rPr lang="en-US" sz="4400" b="0" u="none" strike="noStrike">
-                <a:solidFill>
-                  <a:srgbClr val="000000"/>
-                </a:solidFill>
-                <a:effectLst/>
-                <a:uFillTx/>
+              <a:rPr b="0" lang="en-US" sz="4400" spc="-1" strike="noStrike">
+                <a:solidFill>
+                  <a:srgbClr val="000000"/>
+                </a:solidFill>
                 <a:latin typeface="Arial"/>
               </a:rPr>
               <a:t>Click to edit the title text format</a:t>
             </a:r>
-            <a:endParaRPr lang="en-US" sz="4400" b="0" u="none" strike="noStrike">
-              <a:solidFill>
-                <a:srgbClr val="000000"/>
-              </a:solidFill>
-              <a:effectLst/>
-              <a:uFillTx/>
-              <a:latin typeface="Arial"/>
-            </a:endParaRPr>
-          </a:p>
-        </p:txBody>
-      </p:sp>
-      <p:sp>
-        <p:nvSpPr>
-          <p:cNvPr id="3" name="PlaceHolder 2"/>
+            <a:endParaRPr b="0" lang="en-US" sz="4400" spc="-1" strike="noStrike">
+              <a:solidFill>
+                <a:srgbClr val="000000"/>
+              </a:solidFill>
+              <a:latin typeface="Arial"/>
+            </a:endParaRPr>
+          </a:p>
+        </p:txBody>
+      </p:sp>
+      <p:sp>
+        <p:nvSpPr>
+          <p:cNvPr id="1" name="PlaceHolder 2"/>
           <p:cNvSpPr>
             <a:spLocks noGrp="1"/>
           </p:cNvSpPr>
@@ -380,146 +359,11 @@
           </a:ln>
         </p:spPr>
         <p:txBody>
-          <a:bodyPr lIns="0" tIns="0" rIns="0" bIns="0" anchor="t">
+          <a:bodyPr lIns="0" rIns="0" tIns="0" bIns="0" anchor="t">
             <a:normAutofit/>
           </a:bodyPr>
-          <a:lstStyle>
-            <a:lvl1pPr algn="l">
-              <a:spcBef>
-                <a:spcPts val="1417"/>
-              </a:spcBef>
-              <a:buClr>
-                <a:srgbClr val="000000"/>
-              </a:buClr>
-              <a:buSzPct val="45000"/>
-              <a:buFont typeface="Wingdings" charset="2"/>
-              <a:buChar char=""/>
-              <a:defRPr lang="en-US" sz="3200" b="0" u="none" strike="noStrike">
-                <a:solidFill>
-                  <a:srgbClr val="000000"/>
-                </a:solidFill>
-                <a:effectLst/>
-                <a:uFillTx/>
-                <a:latin typeface="Arial"/>
-              </a:defRPr>
-            </a:lvl1pPr>
-            <a:lvl2pPr lvl="1" algn="l">
-              <a:spcBef>
-                <a:spcPts val="1134"/>
-              </a:spcBef>
-              <a:buClr>
-                <a:srgbClr val="000000"/>
-              </a:buClr>
-              <a:buSzPct val="75000"/>
-              <a:buFont typeface="Symbol" charset="2"/>
-              <a:buChar char=""/>
-              <a:defRPr lang="en-US" sz="2800" b="0" u="none" strike="noStrike">
-                <a:solidFill>
-                  <a:srgbClr val="000000"/>
-                </a:solidFill>
-                <a:effectLst/>
-                <a:uFillTx/>
-                <a:latin typeface="Arial"/>
-              </a:defRPr>
-            </a:lvl2pPr>
-            <a:lvl3pPr lvl="2" algn="l">
-              <a:spcBef>
-                <a:spcPts val="850"/>
-              </a:spcBef>
-              <a:buClr>
-                <a:srgbClr val="000000"/>
-              </a:buClr>
-              <a:buSzPct val="45000"/>
-              <a:buFont typeface="Wingdings" charset="2"/>
-              <a:buChar char=""/>
-              <a:defRPr lang="en-US" sz="2400" b="0" u="none" strike="noStrike">
-                <a:solidFill>
-                  <a:srgbClr val="000000"/>
-                </a:solidFill>
-                <a:effectLst/>
-                <a:uFillTx/>
-                <a:latin typeface="Arial"/>
-              </a:defRPr>
-            </a:lvl3pPr>
-            <a:lvl4pPr lvl="3" algn="l">
-              <a:spcBef>
-                <a:spcPts val="567"/>
-              </a:spcBef>
-              <a:buClr>
-                <a:srgbClr val="000000"/>
-              </a:buClr>
-              <a:buSzPct val="75000"/>
-              <a:buFont typeface="Symbol" charset="2"/>
-              <a:buChar char=""/>
-              <a:defRPr lang="en-US" sz="2000" b="0" u="none" strike="noStrike">
-                <a:solidFill>
-                  <a:srgbClr val="000000"/>
-                </a:solidFill>
-                <a:effectLst/>
-                <a:uFillTx/>
-                <a:latin typeface="Arial"/>
-              </a:defRPr>
-            </a:lvl4pPr>
-            <a:lvl5pPr lvl="4" algn="l">
-              <a:spcBef>
-                <a:spcPts val="283"/>
-              </a:spcBef>
-              <a:buClr>
-                <a:srgbClr val="000000"/>
-              </a:buClr>
-              <a:buSzPct val="45000"/>
-              <a:buFont typeface="Wingdings" charset="2"/>
-              <a:buChar char=""/>
-              <a:defRPr lang="en-US" sz="2000" b="0" u="none" strike="noStrike">
-                <a:solidFill>
-                  <a:srgbClr val="000000"/>
-                </a:solidFill>
-                <a:effectLst/>
-                <a:uFillTx/>
-                <a:latin typeface="Arial"/>
-              </a:defRPr>
-            </a:lvl5pPr>
-            <a:lvl6pPr lvl="5" algn="l">
-              <a:spcBef>
-                <a:spcPts val="283"/>
-              </a:spcBef>
-              <a:buClr>
-                <a:srgbClr val="000000"/>
-              </a:buClr>
-              <a:buSzPct val="45000"/>
-              <a:buFont typeface="Wingdings" charset="2"/>
-              <a:buChar char=""/>
-              <a:defRPr lang="en-US" sz="2000" b="0" u="none" strike="noStrike">
-                <a:solidFill>
-                  <a:srgbClr val="000000"/>
-                </a:solidFill>
-                <a:effectLst/>
-                <a:uFillTx/>
-                <a:latin typeface="Arial"/>
-              </a:defRPr>
-            </a:lvl6pPr>
-            <a:lvl7pPr lvl="6" algn="l">
-              <a:spcBef>
-                <a:spcPts val="283"/>
-              </a:spcBef>
-              <a:buClr>
-                <a:srgbClr val="000000"/>
-              </a:buClr>
-              <a:buSzPct val="45000"/>
-              <a:buFont typeface="Wingdings" charset="2"/>
-              <a:buChar char=""/>
-              <a:defRPr lang="en-US" sz="2000" b="0" u="none" strike="noStrike">
-                <a:solidFill>
-                  <a:srgbClr val="000000"/>
-                </a:solidFill>
-                <a:effectLst/>
-                <a:uFillTx/>
-                <a:latin typeface="Arial"/>
-              </a:defRPr>
-            </a:lvl7pPr>
-          </a:lstStyle>
-          <a:p>
-            <a:pPr marL="432000" indent="-324000" algn="l">
+          <a:p>
+            <a:pPr marL="432000" indent="-324000">
               <a:spcBef>
                 <a:spcPts val="1417"/>
               </a:spcBef>
@@ -531,27 +375,23 @@
               <a:buChar char=""/>
             </a:pPr>
             <a:r>
-              <a:rPr lang="en-US" sz="3200" b="0" u="none" strike="noStrike">
-                <a:solidFill>
-                  <a:srgbClr val="000000"/>
-                </a:solidFill>
-                <a:effectLst/>
-                <a:uFillTx/>
+              <a:rPr b="0" lang="en-US" sz="3200" spc="-1" strike="noStrike">
+                <a:solidFill>
+                  <a:srgbClr val="000000"/>
+                </a:solidFill>
                 <a:latin typeface="Arial"/>
               </a:rPr>
               <a:t>Click to edit the outline text format</a:t>
             </a:r>
-            <a:endParaRPr lang="en-US" sz="3200" b="0" u="none" strike="noStrike">
-              <a:solidFill>
-                <a:srgbClr val="000000"/>
-              </a:solidFill>
-              <a:effectLst/>
-              <a:uFillTx/>
-              <a:latin typeface="Arial"/>
-            </a:endParaRPr>
-          </a:p>
-          <a:p>
-            <a:pPr marL="864000" lvl="1" indent="-324000" algn="l">
+            <a:endParaRPr b="0" lang="en-US" sz="3200" spc="-1" strike="noStrike">
+              <a:solidFill>
+                <a:srgbClr val="000000"/>
+              </a:solidFill>
+              <a:latin typeface="Arial"/>
+            </a:endParaRPr>
+          </a:p>
+          <a:p>
+            <a:pPr lvl="1" marL="864000" indent="-324000">
               <a:spcBef>
                 <a:spcPts val="1134"/>
               </a:spcBef>
@@ -563,27 +403,23 @@
               <a:buChar char=""/>
             </a:pPr>
             <a:r>
-              <a:rPr lang="en-US" sz="2800" b="0" u="none" strike="noStrike">
-                <a:solidFill>
-                  <a:srgbClr val="000000"/>
-                </a:solidFill>
-                <a:effectLst/>
-                <a:uFillTx/>
+              <a:rPr b="0" lang="en-US" sz="2800" spc="-1" strike="noStrike">
+                <a:solidFill>
+                  <a:srgbClr val="000000"/>
+                </a:solidFill>
                 <a:latin typeface="Arial"/>
               </a:rPr>
               <a:t>Second Outline Level</a:t>
             </a:r>
-            <a:endParaRPr lang="en-US" sz="2800" b="0" u="none" strike="noStrike">
-              <a:solidFill>
-                <a:srgbClr val="000000"/>
-              </a:solidFill>
-              <a:effectLst/>
-              <a:uFillTx/>
-              <a:latin typeface="Arial"/>
-            </a:endParaRPr>
-          </a:p>
-          <a:p>
-            <a:pPr marL="1296000" lvl="2" indent="-288000" algn="l">
+            <a:endParaRPr b="0" lang="en-US" sz="2800" spc="-1" strike="noStrike">
+              <a:solidFill>
+                <a:srgbClr val="000000"/>
+              </a:solidFill>
+              <a:latin typeface="Arial"/>
+            </a:endParaRPr>
+          </a:p>
+          <a:p>
+            <a:pPr lvl="2" marL="1296000" indent="-288000">
               <a:spcBef>
                 <a:spcPts val="850"/>
               </a:spcBef>
@@ -595,27 +431,23 @@
               <a:buChar char=""/>
             </a:pPr>
             <a:r>
-              <a:rPr lang="en-US" sz="2400" b="0" u="none" strike="noStrike">
-                <a:solidFill>
-                  <a:srgbClr val="000000"/>
-                </a:solidFill>
-                <a:effectLst/>
-                <a:uFillTx/>
+              <a:rPr b="0" lang="en-US" sz="2400" spc="-1" strike="noStrike">
+                <a:solidFill>
+                  <a:srgbClr val="000000"/>
+                </a:solidFill>
                 <a:latin typeface="Arial"/>
               </a:rPr>
               <a:t>Third Outline Level</a:t>
             </a:r>
-            <a:endParaRPr lang="en-US" sz="2400" b="0" u="none" strike="noStrike">
-              <a:solidFill>
-                <a:srgbClr val="000000"/>
-              </a:solidFill>
-              <a:effectLst/>
-              <a:uFillTx/>
-              <a:latin typeface="Arial"/>
-            </a:endParaRPr>
-          </a:p>
-          <a:p>
-            <a:pPr marL="1728000" lvl="3" indent="-216000" algn="l">
+            <a:endParaRPr b="0" lang="en-US" sz="2400" spc="-1" strike="noStrike">
+              <a:solidFill>
+                <a:srgbClr val="000000"/>
+              </a:solidFill>
+              <a:latin typeface="Arial"/>
+            </a:endParaRPr>
+          </a:p>
+          <a:p>
+            <a:pPr lvl="3" marL="1728000" indent="-216000">
               <a:spcBef>
                 <a:spcPts val="567"/>
               </a:spcBef>
@@ -627,27 +459,23 @@
               <a:buChar char=""/>
             </a:pPr>
             <a:r>
-              <a:rPr lang="en-US" sz="2000" b="0" u="none" strike="noStrike">
-                <a:solidFill>
-                  <a:srgbClr val="000000"/>
-                </a:solidFill>
-                <a:effectLst/>
-                <a:uFillTx/>
+              <a:rPr b="0" lang="en-US" sz="2000" spc="-1" strike="noStrike">
+                <a:solidFill>
+                  <a:srgbClr val="000000"/>
+                </a:solidFill>
                 <a:latin typeface="Arial"/>
               </a:rPr>
               <a:t>Fourth Outline Level</a:t>
             </a:r>
-            <a:endParaRPr lang="en-US" sz="2000" b="0" u="none" strike="noStrike">
-              <a:solidFill>
-                <a:srgbClr val="000000"/>
-              </a:solidFill>
-              <a:effectLst/>
-              <a:uFillTx/>
-              <a:latin typeface="Arial"/>
-            </a:endParaRPr>
-          </a:p>
-          <a:p>
-            <a:pPr marL="2160000" lvl="4" indent="-216000" algn="l">
+            <a:endParaRPr b="0" lang="en-US" sz="2000" spc="-1" strike="noStrike">
+              <a:solidFill>
+                <a:srgbClr val="000000"/>
+              </a:solidFill>
+              <a:latin typeface="Arial"/>
+            </a:endParaRPr>
+          </a:p>
+          <a:p>
+            <a:pPr lvl="4" marL="2160000" indent="-216000">
               <a:spcBef>
                 <a:spcPts val="283"/>
               </a:spcBef>
@@ -659,27 +487,23 @@
               <a:buChar char=""/>
             </a:pPr>
             <a:r>
-              <a:rPr lang="en-US" sz="2000" b="0" u="none" strike="noStrike">
-                <a:solidFill>
-                  <a:srgbClr val="000000"/>
-                </a:solidFill>
-                <a:effectLst/>
-                <a:uFillTx/>
+              <a:rPr b="0" lang="en-US" sz="2000" spc="-1" strike="noStrike">
+                <a:solidFill>
+                  <a:srgbClr val="000000"/>
+                </a:solidFill>
                 <a:latin typeface="Arial"/>
               </a:rPr>
               <a:t>Fifth Outline Level</a:t>
             </a:r>
-            <a:endParaRPr lang="en-US" sz="2000" b="0" u="none" strike="noStrike">
-              <a:solidFill>
-                <a:srgbClr val="000000"/>
-              </a:solidFill>
-              <a:effectLst/>
-              <a:uFillTx/>
-              <a:latin typeface="Arial"/>
-            </a:endParaRPr>
-          </a:p>
-          <a:p>
-            <a:pPr marL="2592000" lvl="5" indent="-216000" algn="l">
+            <a:endParaRPr b="0" lang="en-US" sz="2000" spc="-1" strike="noStrike">
+              <a:solidFill>
+                <a:srgbClr val="000000"/>
+              </a:solidFill>
+              <a:latin typeface="Arial"/>
+            </a:endParaRPr>
+          </a:p>
+          <a:p>
+            <a:pPr lvl="5" marL="2592000" indent="-216000">
               <a:spcBef>
                 <a:spcPts val="283"/>
               </a:spcBef>
@@ -691,27 +515,23 @@
               <a:buChar char=""/>
             </a:pPr>
             <a:r>
-              <a:rPr lang="en-US" sz="2000" b="0" u="none" strike="noStrike">
-                <a:solidFill>
-                  <a:srgbClr val="000000"/>
-                </a:solidFill>
-                <a:effectLst/>
-                <a:uFillTx/>
+              <a:rPr b="0" lang="en-US" sz="2000" spc="-1" strike="noStrike">
+                <a:solidFill>
+                  <a:srgbClr val="000000"/>
+                </a:solidFill>
                 <a:latin typeface="Arial"/>
               </a:rPr>
               <a:t>Sixth Outline Level</a:t>
             </a:r>
-            <a:endParaRPr lang="en-US" sz="2000" b="0" u="none" strike="noStrike">
-              <a:solidFill>
-                <a:srgbClr val="000000"/>
-              </a:solidFill>
-              <a:effectLst/>
-              <a:uFillTx/>
-              <a:latin typeface="Arial"/>
-            </a:endParaRPr>
-          </a:p>
-          <a:p>
-            <a:pPr marL="3024000" lvl="6" indent="-216000" algn="l">
+            <a:endParaRPr b="0" lang="en-US" sz="2000" spc="-1" strike="noStrike">
+              <a:solidFill>
+                <a:srgbClr val="000000"/>
+              </a:solidFill>
+              <a:latin typeface="Arial"/>
+            </a:endParaRPr>
+          </a:p>
+          <a:p>
+            <a:pPr lvl="6" marL="3024000" indent="-216000">
               <a:spcBef>
                 <a:spcPts val="283"/>
               </a:spcBef>
@@ -723,30 +543,26 @@
               <a:buChar char=""/>
             </a:pPr>
             <a:r>
-              <a:rPr lang="en-US" sz="2000" b="0" u="none" strike="noStrike">
-                <a:solidFill>
-                  <a:srgbClr val="000000"/>
-                </a:solidFill>
-                <a:effectLst/>
-                <a:uFillTx/>
+              <a:rPr b="0" lang="en-US" sz="2000" spc="-1" strike="noStrike">
+                <a:solidFill>
+                  <a:srgbClr val="000000"/>
+                </a:solidFill>
                 <a:latin typeface="Arial"/>
               </a:rPr>
               <a:t>Seventh Outline Level</a:t>
             </a:r>
-            <a:endParaRPr lang="en-US" sz="2000" b="0" u="none" strike="noStrike">
-              <a:solidFill>
-                <a:srgbClr val="000000"/>
-              </a:solidFill>
-              <a:effectLst/>
-              <a:uFillTx/>
-              <a:latin typeface="Arial"/>
-            </a:endParaRPr>
-          </a:p>
-        </p:txBody>
-      </p:sp>
-      <p:sp>
-        <p:nvSpPr>
-          <p:cNvPr id="4" name="PlaceHolder 3"/>
+            <a:endParaRPr b="0" lang="en-US" sz="2000" spc="-1" strike="noStrike">
+              <a:solidFill>
+                <a:srgbClr val="000000"/>
+              </a:solidFill>
+              <a:latin typeface="Arial"/>
+            </a:endParaRPr>
+          </a:p>
+        </p:txBody>
+      </p:sp>
+      <p:sp>
+        <p:nvSpPr>
+          <p:cNvPr id="2" name="PlaceHolder 3"/>
           <p:cNvSpPr>
             <a:spLocks noGrp="1"/>
           </p:cNvSpPr>
@@ -768,43 +584,37 @@
           </a:ln>
         </p:spPr>
         <p:txBody>
-          <a:bodyPr lIns="0" tIns="0" rIns="0" bIns="0" anchor="t">
+          <a:bodyPr lIns="0" rIns="0" tIns="0" bIns="0" anchor="t">
             <a:noAutofit/>
           </a:bodyPr>
           <a:lstStyle>
-            <a:lvl1pPr indent="0" algn="l">
+            <a:lvl1pPr indent="0">
               <a:buNone/>
-              <a:defRPr lang="en-US" sz="1400" b="0" u="none" strike="noStrike">
-                <a:solidFill>
-                  <a:srgbClr val="000000"/>
-                </a:solidFill>
-                <a:effectLst/>
-                <a:uFillTx/>
+              <a:defRPr b="0" lang="en-US" sz="1400" spc="-1" strike="noStrike">
+                <a:solidFill>
+                  <a:srgbClr val="000000"/>
+                </a:solidFill>
                 <a:latin typeface="Times New Roman"/>
               </a:defRPr>
             </a:lvl1pPr>
           </a:lstStyle>
           <a:p>
-            <a:pPr indent="0" algn="l">
+            <a:pPr indent="0">
               <a:buNone/>
             </a:pPr>
             <a:r>
-              <a:rPr lang="en-US" sz="1400" b="0" u="none" strike="noStrike">
-                <a:solidFill>
-                  <a:srgbClr val="000000"/>
-                </a:solidFill>
-                <a:effectLst/>
-                <a:uFillTx/>
+              <a:rPr b="0" lang="en-US" sz="1400" spc="-1" strike="noStrike">
+                <a:solidFill>
+                  <a:srgbClr val="000000"/>
+                </a:solidFill>
                 <a:latin typeface="Times New Roman"/>
               </a:rPr>
               <a:t>&lt;date/time&gt;</a:t>
             </a:r>
-            <a:endParaRPr lang="en-US" sz="1400" b="0" u="none" strike="noStrike">
-              <a:solidFill>
-                <a:srgbClr val="000000"/>
-              </a:solidFill>
-              <a:effectLst/>
-              <a:uFillTx/>
+            <a:endParaRPr b="0" lang="en-US" sz="1400" spc="-1" strike="noStrike">
+              <a:solidFill>
+                <a:srgbClr val="000000"/>
+              </a:solidFill>
               <a:latin typeface="Times New Roman"/>
             </a:endParaRPr>
           </a:p>
@@ -812,7 +622,7 @@
       </p:sp>
       <p:sp>
         <p:nvSpPr>
-          <p:cNvPr id="5" name="PlaceHolder 4"/>
+          <p:cNvPr id="3" name="PlaceHolder 4"/>
           <p:cNvSpPr>
             <a:spLocks noGrp="1"/>
           </p:cNvSpPr>
@@ -834,18 +644,16 @@
           </a:ln>
         </p:spPr>
         <p:txBody>
-          <a:bodyPr lIns="0" tIns="0" rIns="0" bIns="0" anchor="t">
+          <a:bodyPr lIns="0" rIns="0" tIns="0" bIns="0" anchor="t">
             <a:noAutofit/>
           </a:bodyPr>
           <a:lstStyle>
             <a:lvl1pPr indent="0" algn="ctr">
               <a:buNone/>
-              <a:defRPr lang="en-US" sz="1400" b="0" u="none" strike="noStrike">
-                <a:solidFill>
-                  <a:srgbClr val="000000"/>
-                </a:solidFill>
-                <a:effectLst/>
-                <a:uFillTx/>
+              <a:defRPr b="0" lang="en-US" sz="1400" spc="-1" strike="noStrike">
+                <a:solidFill>
+                  <a:srgbClr val="000000"/>
+                </a:solidFill>
                 <a:latin typeface="Times New Roman"/>
               </a:defRPr>
             </a:lvl1pPr>
@@ -855,22 +663,18 @@
               <a:buNone/>
             </a:pPr>
             <a:r>
-              <a:rPr lang="en-US" sz="1400" b="0" u="none" strike="noStrike">
-                <a:solidFill>
-                  <a:srgbClr val="000000"/>
-                </a:solidFill>
-                <a:effectLst/>
-                <a:uFillTx/>
+              <a:rPr b="0" lang="en-US" sz="1400" spc="-1" strike="noStrike">
+                <a:solidFill>
+                  <a:srgbClr val="000000"/>
+                </a:solidFill>
                 <a:latin typeface="Times New Roman"/>
               </a:rPr>
               <a:t>&lt;footer&gt;</a:t>
             </a:r>
-            <a:endParaRPr lang="en-US" sz="1400" b="0" u="none" strike="noStrike">
-              <a:solidFill>
-                <a:srgbClr val="000000"/>
-              </a:solidFill>
-              <a:effectLst/>
-              <a:uFillTx/>
+            <a:endParaRPr b="0" lang="en-US" sz="1400" spc="-1" strike="noStrike">
+              <a:solidFill>
+                <a:srgbClr val="000000"/>
+              </a:solidFill>
               <a:latin typeface="Times New Roman"/>
             </a:endParaRPr>
           </a:p>
@@ -878,7 +682,7 @@
       </p:sp>
       <p:sp>
         <p:nvSpPr>
-          <p:cNvPr id="6" name="PlaceHolder 5"/>
+          <p:cNvPr id="4" name="PlaceHolder 5"/>
           <p:cNvSpPr>
             <a:spLocks noGrp="1"/>
           </p:cNvSpPr>
@@ -900,18 +704,16 @@
           </a:ln>
         </p:spPr>
         <p:txBody>
-          <a:bodyPr lIns="0" tIns="0" rIns="0" bIns="0" anchor="t">
+          <a:bodyPr lIns="0" rIns="0" tIns="0" bIns="0" anchor="t">
             <a:noAutofit/>
           </a:bodyPr>
           <a:lstStyle>
             <a:lvl1pPr indent="0" algn="r">
               <a:buNone/>
-              <a:defRPr lang="en-US" sz="1400" b="0" u="none" strike="noStrike">
-                <a:solidFill>
-                  <a:srgbClr val="000000"/>
-                </a:solidFill>
-                <a:effectLst/>
-                <a:uFillTx/>
+              <a:defRPr b="0" lang="en-US" sz="1400" spc="-1" strike="noStrike">
+                <a:solidFill>
+                  <a:srgbClr val="000000"/>
+                </a:solidFill>
                 <a:latin typeface="Times New Roman"/>
               </a:defRPr>
             </a:lvl1pPr>
@@ -920,23 +722,19 @@
             <a:pPr indent="0" algn="r">
               <a:buNone/>
             </a:pPr>
-            <a:fld id="{1E15143B-6A47-4DDB-B49F-301204F767E6}" type="slidenum">
-              <a:rPr lang="en-US" sz="1400" b="0" u="none" strike="noStrike">
-                <a:solidFill>
-                  <a:srgbClr val="000000"/>
-                </a:solidFill>
-                <a:effectLst/>
-                <a:uFillTx/>
+            <a:fld id="{4B743393-D04D-47FB-835D-FFE602A83ACD}" type="slidenum">
+              <a:rPr b="0" lang="en-US" sz="1400" spc="-1" strike="noStrike">
+                <a:solidFill>
+                  <a:srgbClr val="000000"/>
+                </a:solidFill>
                 <a:latin typeface="Times New Roman"/>
               </a:rPr>
               <a:t>&lt;number&gt;</a:t>
             </a:fld>
-            <a:endParaRPr lang="en-US" sz="1400" b="0" u="none" strike="noStrike">
-              <a:solidFill>
-                <a:srgbClr val="000000"/>
-              </a:solidFill>
-              <a:effectLst/>
-              <a:uFillTx/>
+            <a:endParaRPr b="0" lang="en-US" sz="1400" spc="-1" strike="noStrike">
+              <a:solidFill>
+                <a:srgbClr val="000000"/>
+              </a:solidFill>
               <a:latin typeface="Times New Roman"/>
             </a:endParaRPr>
           </a:p>
@@ -944,7 +742,7 @@
       </p:sp>
     </p:spTree>
   </p:cSld>
-  <p:clrMap bg1="lt1" tx1="dk1" bg2="lt2" tx2="dk2" accent1="accent1" accent2="accent2" accent3="accent3" accent4="accent4" accent5="accent5" accent6="accent6" hlink="hlink" folHlink="folHlink"/>
+  <p:clrMap bg1="lt1" bg2="lt2" tx1="dk1" tx2="dk2" accent1="accent1" accent2="accent2" accent3="accent3" accent4="accent4" accent5="accent5" accent6="accent6" hlink="hlink" folHlink="folHlink"/>
   <p:sldLayoutIdLst>
     <p:sldLayoutId id="2147483649" r:id="rId2"/>
     <p:sldLayoutId id="2147483650" r:id="rId3"/>
@@ -971,7 +769,7 @@
       </p:grpSpPr>
       <p:sp>
         <p:nvSpPr>
-          <p:cNvPr id="9" name="title"/>
+          <p:cNvPr id="7" name="title"/>
           <p:cNvSpPr txBox="1"/>
           <p:nvPr/>
         </p:nvSpPr>
@@ -984,41 +782,36 @@
             <a:avLst/>
           </a:prstGeom>
           <a:noFill/>
-          <a:ln w="38160">
+          <a:ln w="0">
             <a:noFill/>
           </a:ln>
         </p:spPr>
         <p:txBody>
-          <a:bodyPr lIns="90000" tIns="45000" rIns="90000" bIns="45000" anchor="t">
-            <a:spAutoFit/>
-          </a:bodyPr>
-          <a:p>
-            <a:pPr/>
-            <a:r>
-              <a:rPr lang="en-US" sz="3200" b="1" u="none" strike="noStrike">
-                <a:solidFill>
-                  <a:srgbClr val="000000"/>
-                </a:solidFill>
-                <a:effectLst/>
-                <a:uFillTx/>
+          <a:bodyPr lIns="90000" rIns="90000" tIns="45000" bIns="45000" anchor="t">
+            <a:noAutofit/>
+          </a:bodyPr>
+          <a:p>
+            <a:r>
+              <a:rPr b="1" lang="en-US" sz="3200" spc="-1" strike="noStrike">
+                <a:solidFill>
+                  <a:srgbClr val="000000"/>
+                </a:solidFill>
                 <a:latin typeface="Arial"/>
               </a:rPr>
               <a:t>Slide 01</a:t>
             </a:r>
-            <a:endParaRPr lang="en-US" sz="3200" b="0" u="none" strike="noStrike">
-              <a:solidFill>
-                <a:srgbClr val="000000"/>
-              </a:solidFill>
-              <a:effectLst/>
-              <a:uFillTx/>
-              <a:latin typeface="Arial"/>
-            </a:endParaRPr>
-          </a:p>
-        </p:txBody>
-      </p:sp>
-      <p:sp>
-        <p:nvSpPr>
-          <p:cNvPr id="10" name="shape"/>
+            <a:endParaRPr b="0" lang="en-US" sz="3200" spc="-1" strike="noStrike">
+              <a:solidFill>
+                <a:srgbClr val="000000"/>
+              </a:solidFill>
+              <a:latin typeface="Arial"/>
+            </a:endParaRPr>
+          </a:p>
+        </p:txBody>
+      </p:sp>
+      <p:sp>
+        <p:nvSpPr>
+          <p:cNvPr id="8" name="shape"/>
           <p:cNvSpPr txBox="1"/>
           <p:nvPr/>
         </p:nvSpPr>
@@ -1031,41 +824,32 @@
             <a:avLst/>
           </a:prstGeom>
           <a:solidFill>
-            <a:schemeClr val="accent1"/>
+            <a:srgbClr val="729fcf"/>
           </a:solidFill>
-          <a:ln w="38160">
+          <a:ln w="0">
             <a:solidFill>
-              <a:schemeClr val="accent1">
-                <a:lumMod val="75000"/>
-                <a:lumOff val="0"/>
-              </a:schemeClr>
+              <a:srgbClr val="3465a4"/>
             </a:solidFill>
-            <a:round/>
-          </a:ln>
-        </p:spPr>
-        <p:txBody>
-          <a:bodyPr lIns="90000" tIns="45000" rIns="90000" bIns="45000" anchor="t">
-            <a:spAutoFit/>
-          </a:bodyPr>
-          <a:p>
-            <a:pPr/>
-            <a:r>
-              <a:rPr lang="en-US" sz="1800" b="0" u="none" strike="noStrike">
-                <a:solidFill>
-                  <a:srgbClr val="FFFFFF"/>
-                </a:solidFill>
-                <a:effectLst/>
-                <a:uFillTx/>
+          </a:ln>
+        </p:spPr>
+        <p:txBody>
+          <a:bodyPr lIns="90000" rIns="90000" tIns="45000" bIns="45000" anchor="t">
+            <a:noAutofit/>
+          </a:bodyPr>
+          <a:p>
+            <a:r>
+              <a:rPr b="0" lang="en-US" sz="1800" spc="-1" strike="noStrike">
+                <a:solidFill>
+                  <a:srgbClr val="000000"/>
+                </a:solidFill>
                 <a:latin typeface="Arial"/>
               </a:rPr>
               <a:t>Order marker 01</a:t>
             </a:r>
-            <a:endParaRPr lang="en-US" sz="1800" b="0" u="none" strike="noStrike">
-              <a:solidFill>
-                <a:srgbClr val="FFFFFF"/>
-              </a:solidFill>
-              <a:effectLst/>
-              <a:uFillTx/>
+            <a:endParaRPr b="0" lang="en-US" sz="1800" spc="-1" strike="noStrike">
+              <a:solidFill>
+                <a:srgbClr val="000000"/>
+              </a:solidFill>
               <a:latin typeface="Arial"/>
             </a:endParaRPr>
           </a:p>
@@ -1103,7 +887,7 @@
       </p:grpSpPr>
       <p:sp>
         <p:nvSpPr>
-          <p:cNvPr id="27" name="title"/>
+          <p:cNvPr id="25" name="title"/>
           <p:cNvSpPr txBox="1"/>
           <p:nvPr/>
         </p:nvSpPr>
@@ -1116,41 +900,36 @@
             <a:avLst/>
           </a:prstGeom>
           <a:noFill/>
-          <a:ln w="38160">
+          <a:ln w="0">
             <a:noFill/>
           </a:ln>
         </p:spPr>
         <p:txBody>
-          <a:bodyPr lIns="90000" tIns="45000" rIns="90000" bIns="45000" anchor="t">
-            <a:spAutoFit/>
-          </a:bodyPr>
-          <a:p>
-            <a:pPr/>
-            <a:r>
-              <a:rPr lang="en-US" sz="3200" b="1" u="none" strike="noStrike">
-                <a:solidFill>
-                  <a:srgbClr val="000000"/>
-                </a:solidFill>
-                <a:effectLst/>
-                <a:uFillTx/>
+          <a:bodyPr lIns="90000" rIns="90000" tIns="45000" bIns="45000" anchor="t">
+            <a:noAutofit/>
+          </a:bodyPr>
+          <a:p>
+            <a:r>
+              <a:rPr b="1" lang="en-US" sz="3200" spc="-1" strike="noStrike">
+                <a:solidFill>
+                  <a:srgbClr val="000000"/>
+                </a:solidFill>
                 <a:latin typeface="Arial"/>
               </a:rPr>
               <a:t>Slide 08</a:t>
             </a:r>
-            <a:endParaRPr lang="en-US" sz="3200" b="0" u="none" strike="noStrike">
-              <a:solidFill>
-                <a:srgbClr val="000000"/>
-              </a:solidFill>
-              <a:effectLst/>
-              <a:uFillTx/>
-              <a:latin typeface="Arial"/>
-            </a:endParaRPr>
-          </a:p>
-        </p:txBody>
-      </p:sp>
-      <p:sp>
-        <p:nvSpPr>
-          <p:cNvPr id="28" name="shape"/>
+            <a:endParaRPr b="0" lang="en-US" sz="3200" spc="-1" strike="noStrike">
+              <a:solidFill>
+                <a:srgbClr val="000000"/>
+              </a:solidFill>
+              <a:latin typeface="Arial"/>
+            </a:endParaRPr>
+          </a:p>
+        </p:txBody>
+      </p:sp>
+      <p:sp>
+        <p:nvSpPr>
+          <p:cNvPr id="26" name="shape"/>
           <p:cNvSpPr txBox="1"/>
           <p:nvPr/>
         </p:nvSpPr>
@@ -1163,41 +942,32 @@
             <a:avLst/>
           </a:prstGeom>
           <a:solidFill>
-            <a:schemeClr val="accent1"/>
+            <a:srgbClr val="729fcf"/>
           </a:solidFill>
-          <a:ln w="38160">
+          <a:ln w="0">
             <a:solidFill>
-              <a:schemeClr val="accent1">
-                <a:lumMod val="75000"/>
-                <a:lumOff val="0"/>
-              </a:schemeClr>
+              <a:srgbClr val="3465a4"/>
             </a:solidFill>
-            <a:round/>
-          </a:ln>
-        </p:spPr>
-        <p:txBody>
-          <a:bodyPr lIns="90000" tIns="45000" rIns="90000" bIns="45000" anchor="t">
-            <a:spAutoFit/>
-          </a:bodyPr>
-          <a:p>
-            <a:pPr/>
-            <a:r>
-              <a:rPr lang="en-US" sz="1800" b="0" u="none" strike="noStrike">
-                <a:solidFill>
-                  <a:srgbClr val="FFFFFF"/>
-                </a:solidFill>
-                <a:effectLst/>
-                <a:uFillTx/>
+          </a:ln>
+        </p:spPr>
+        <p:txBody>
+          <a:bodyPr lIns="90000" rIns="90000" tIns="45000" bIns="45000" anchor="t">
+            <a:noAutofit/>
+          </a:bodyPr>
+          <a:p>
+            <a:r>
+              <a:rPr b="0" lang="en-US" sz="1800" spc="-1" strike="noStrike">
+                <a:solidFill>
+                  <a:srgbClr val="000000"/>
+                </a:solidFill>
                 <a:latin typeface="Arial"/>
               </a:rPr>
               <a:t>Order marker 08</a:t>
             </a:r>
-            <a:endParaRPr lang="en-US" sz="1800" b="0" u="none" strike="noStrike">
-              <a:solidFill>
-                <a:srgbClr val="FFFFFF"/>
-              </a:solidFill>
-              <a:effectLst/>
-              <a:uFillTx/>
+            <a:endParaRPr b="0" lang="en-US" sz="1800" spc="-1" strike="noStrike">
+              <a:solidFill>
+                <a:srgbClr val="000000"/>
+              </a:solidFill>
               <a:latin typeface="Arial"/>
             </a:endParaRPr>
           </a:p>
@@ -1235,7 +1005,7 @@
       </p:grpSpPr>
       <p:sp>
         <p:nvSpPr>
-          <p:cNvPr id="29" name="title"/>
+          <p:cNvPr id="27" name="title"/>
           <p:cNvSpPr txBox="1"/>
           <p:nvPr/>
         </p:nvSpPr>
@@ -1248,41 +1018,36 @@
             <a:avLst/>
           </a:prstGeom>
           <a:noFill/>
-          <a:ln w="38160">
+          <a:ln w="0">
             <a:noFill/>
           </a:ln>
         </p:spPr>
         <p:txBody>
-          <a:bodyPr lIns="90000" tIns="45000" rIns="90000" bIns="45000" anchor="t">
-            <a:spAutoFit/>
-          </a:bodyPr>
-          <a:p>
-            <a:pPr/>
-            <a:r>
-              <a:rPr lang="en-US" sz="3200" b="1" u="none" strike="noStrike">
-                <a:solidFill>
-                  <a:srgbClr val="000000"/>
-                </a:solidFill>
-                <a:effectLst/>
-                <a:uFillTx/>
+          <a:bodyPr lIns="90000" rIns="90000" tIns="45000" bIns="45000" anchor="t">
+            <a:noAutofit/>
+          </a:bodyPr>
+          <a:p>
+            <a:r>
+              <a:rPr b="1" lang="en-US" sz="3200" spc="-1" strike="noStrike">
+                <a:solidFill>
+                  <a:srgbClr val="000000"/>
+                </a:solidFill>
                 <a:latin typeface="Arial"/>
               </a:rPr>
               <a:t>Slide 09</a:t>
             </a:r>
-            <a:endParaRPr lang="en-US" sz="3200" b="0" u="none" strike="noStrike">
-              <a:solidFill>
-                <a:srgbClr val="000000"/>
-              </a:solidFill>
-              <a:effectLst/>
-              <a:uFillTx/>
-              <a:latin typeface="Arial"/>
-            </a:endParaRPr>
-          </a:p>
-        </p:txBody>
-      </p:sp>
-      <p:sp>
-        <p:nvSpPr>
-          <p:cNvPr id="30" name="shape"/>
+            <a:endParaRPr b="0" lang="en-US" sz="3200" spc="-1" strike="noStrike">
+              <a:solidFill>
+                <a:srgbClr val="000000"/>
+              </a:solidFill>
+              <a:latin typeface="Arial"/>
+            </a:endParaRPr>
+          </a:p>
+        </p:txBody>
+      </p:sp>
+      <p:sp>
+        <p:nvSpPr>
+          <p:cNvPr id="28" name="shape"/>
           <p:cNvSpPr txBox="1"/>
           <p:nvPr/>
         </p:nvSpPr>
@@ -1295,41 +1060,32 @@
             <a:avLst/>
           </a:prstGeom>
           <a:solidFill>
-            <a:schemeClr val="accent1"/>
+            <a:srgbClr val="729fcf"/>
           </a:solidFill>
-          <a:ln w="38160">
+          <a:ln w="0">
             <a:solidFill>
-              <a:schemeClr val="accent1">
-                <a:lumMod val="75000"/>
-                <a:lumOff val="0"/>
-              </a:schemeClr>
+              <a:srgbClr val="3465a4"/>
             </a:solidFill>
-            <a:round/>
-          </a:ln>
-        </p:spPr>
-        <p:txBody>
-          <a:bodyPr lIns="90000" tIns="45000" rIns="90000" bIns="45000" anchor="t">
-            <a:spAutoFit/>
-          </a:bodyPr>
-          <a:p>
-            <a:pPr/>
-            <a:r>
-              <a:rPr lang="en-US" sz="1800" b="0" u="none" strike="noStrike">
-                <a:solidFill>
-                  <a:srgbClr val="FFFFFF"/>
-                </a:solidFill>
-                <a:effectLst/>
-                <a:uFillTx/>
+          </a:ln>
+        </p:spPr>
+        <p:txBody>
+          <a:bodyPr lIns="90000" rIns="90000" tIns="45000" bIns="45000" anchor="t">
+            <a:noAutofit/>
+          </a:bodyPr>
+          <a:p>
+            <a:r>
+              <a:rPr b="0" lang="en-US" sz="1800" spc="-1" strike="noStrike">
+                <a:solidFill>
+                  <a:srgbClr val="000000"/>
+                </a:solidFill>
                 <a:latin typeface="Arial"/>
               </a:rPr>
               <a:t>Order marker 09</a:t>
             </a:r>
-            <a:endParaRPr lang="en-US" sz="1800" b="0" u="none" strike="noStrike">
-              <a:solidFill>
-                <a:srgbClr val="FFFFFF"/>
-              </a:solidFill>
-              <a:effectLst/>
-              <a:uFillTx/>
+            <a:endParaRPr b="0" lang="en-US" sz="1800" spc="-1" strike="noStrike">
+              <a:solidFill>
+                <a:srgbClr val="000000"/>
+              </a:solidFill>
               <a:latin typeface="Arial"/>
             </a:endParaRPr>
           </a:p>
@@ -1367,7 +1123,7 @@
       </p:grpSpPr>
       <p:sp>
         <p:nvSpPr>
-          <p:cNvPr id="31" name="title"/>
+          <p:cNvPr id="29" name="title"/>
           <p:cNvSpPr txBox="1"/>
           <p:nvPr/>
         </p:nvSpPr>
@@ -1380,41 +1136,36 @@
             <a:avLst/>
           </a:prstGeom>
           <a:noFill/>
-          <a:ln w="38160">
+          <a:ln w="0">
             <a:noFill/>
           </a:ln>
         </p:spPr>
         <p:txBody>
-          <a:bodyPr lIns="90000" tIns="45000" rIns="90000" bIns="45000" anchor="t">
-            <a:spAutoFit/>
-          </a:bodyPr>
-          <a:p>
-            <a:pPr/>
-            <a:r>
-              <a:rPr lang="en-US" sz="3200" b="1" u="none" strike="noStrike">
-                <a:solidFill>
-                  <a:srgbClr val="000000"/>
-                </a:solidFill>
-                <a:effectLst/>
-                <a:uFillTx/>
+          <a:bodyPr lIns="90000" rIns="90000" tIns="45000" bIns="45000" anchor="t">
+            <a:noAutofit/>
+          </a:bodyPr>
+          <a:p>
+            <a:r>
+              <a:rPr b="1" lang="en-US" sz="3200" spc="-1" strike="noStrike">
+                <a:solidFill>
+                  <a:srgbClr val="000000"/>
+                </a:solidFill>
                 <a:latin typeface="Arial"/>
               </a:rPr>
               <a:t>Slide 12</a:t>
             </a:r>
-            <a:endParaRPr lang="en-US" sz="3200" b="0" u="none" strike="noStrike">
-              <a:solidFill>
-                <a:srgbClr val="000000"/>
-              </a:solidFill>
-              <a:effectLst/>
-              <a:uFillTx/>
-              <a:latin typeface="Arial"/>
-            </a:endParaRPr>
-          </a:p>
-        </p:txBody>
-      </p:sp>
-      <p:sp>
-        <p:nvSpPr>
-          <p:cNvPr id="32" name="shape"/>
+            <a:endParaRPr b="0" lang="en-US" sz="3200" spc="-1" strike="noStrike">
+              <a:solidFill>
+                <a:srgbClr val="000000"/>
+              </a:solidFill>
+              <a:latin typeface="Arial"/>
+            </a:endParaRPr>
+          </a:p>
+        </p:txBody>
+      </p:sp>
+      <p:sp>
+        <p:nvSpPr>
+          <p:cNvPr id="30" name="shape"/>
           <p:cNvSpPr txBox="1"/>
           <p:nvPr/>
         </p:nvSpPr>
@@ -1427,41 +1178,32 @@
             <a:avLst/>
           </a:prstGeom>
           <a:solidFill>
-            <a:schemeClr val="accent1"/>
+            <a:srgbClr val="729fcf"/>
           </a:solidFill>
-          <a:ln w="38160">
+          <a:ln w="0">
             <a:solidFill>
-              <a:schemeClr val="accent1">
-                <a:lumMod val="75000"/>
-                <a:lumOff val="0"/>
-              </a:schemeClr>
+              <a:srgbClr val="3465a4"/>
             </a:solidFill>
-            <a:round/>
-          </a:ln>
-        </p:spPr>
-        <p:txBody>
-          <a:bodyPr lIns="90000" tIns="45000" rIns="90000" bIns="45000" anchor="t">
-            <a:spAutoFit/>
-          </a:bodyPr>
-          <a:p>
-            <a:pPr/>
-            <a:r>
-              <a:rPr lang="en-US" sz="1800" b="0" u="none" strike="noStrike">
-                <a:solidFill>
-                  <a:srgbClr val="FFFFFF"/>
-                </a:solidFill>
-                <a:effectLst/>
-                <a:uFillTx/>
+          </a:ln>
+        </p:spPr>
+        <p:txBody>
+          <a:bodyPr lIns="90000" rIns="90000" tIns="45000" bIns="45000" anchor="t">
+            <a:noAutofit/>
+          </a:bodyPr>
+          <a:p>
+            <a:r>
+              <a:rPr b="0" lang="en-US" sz="1800" spc="-1" strike="noStrike">
+                <a:solidFill>
+                  <a:srgbClr val="000000"/>
+                </a:solidFill>
                 <a:latin typeface="Arial"/>
               </a:rPr>
               <a:t>Order marker 12</a:t>
             </a:r>
-            <a:endParaRPr lang="en-US" sz="1800" b="0" u="none" strike="noStrike">
-              <a:solidFill>
-                <a:srgbClr val="FFFFFF"/>
-              </a:solidFill>
-              <a:effectLst/>
-              <a:uFillTx/>
+            <a:endParaRPr b="0" lang="en-US" sz="1800" spc="-1" strike="noStrike">
+              <a:solidFill>
+                <a:srgbClr val="000000"/>
+              </a:solidFill>
               <a:latin typeface="Arial"/>
             </a:endParaRPr>
           </a:p>
@@ -1499,7 +1241,7 @@
       </p:grpSpPr>
       <p:sp>
         <p:nvSpPr>
-          <p:cNvPr id="11" name="title"/>
+          <p:cNvPr id="9" name="title"/>
           <p:cNvSpPr txBox="1"/>
           <p:nvPr/>
         </p:nvSpPr>
@@ -1512,41 +1254,36 @@
             <a:avLst/>
           </a:prstGeom>
           <a:noFill/>
-          <a:ln w="38160">
+          <a:ln w="0">
             <a:noFill/>
           </a:ln>
         </p:spPr>
         <p:txBody>
-          <a:bodyPr lIns="90000" tIns="45000" rIns="90000" bIns="45000" anchor="t">
-            <a:spAutoFit/>
-          </a:bodyPr>
-          <a:p>
-            <a:pPr/>
-            <a:r>
-              <a:rPr lang="en-US" sz="3200" b="1" u="none" strike="noStrike">
-                <a:solidFill>
-                  <a:srgbClr val="000000"/>
-                </a:solidFill>
-                <a:effectLst/>
-                <a:uFillTx/>
+          <a:bodyPr lIns="90000" rIns="90000" tIns="45000" bIns="45000" anchor="t">
+            <a:noAutofit/>
+          </a:bodyPr>
+          <a:p>
+            <a:r>
+              <a:rPr b="1" lang="en-US" sz="3200" spc="-1" strike="noStrike">
+                <a:solidFill>
+                  <a:srgbClr val="000000"/>
+                </a:solidFill>
                 <a:latin typeface="Arial"/>
               </a:rPr>
               <a:t>Slide 02</a:t>
             </a:r>
-            <a:endParaRPr lang="en-US" sz="3200" b="0" u="none" strike="noStrike">
-              <a:solidFill>
-                <a:srgbClr val="000000"/>
-              </a:solidFill>
-              <a:effectLst/>
-              <a:uFillTx/>
-              <a:latin typeface="Arial"/>
-            </a:endParaRPr>
-          </a:p>
-        </p:txBody>
-      </p:sp>
-      <p:sp>
-        <p:nvSpPr>
-          <p:cNvPr id="12" name="shape"/>
+            <a:endParaRPr b="0" lang="en-US" sz="3200" spc="-1" strike="noStrike">
+              <a:solidFill>
+                <a:srgbClr val="000000"/>
+              </a:solidFill>
+              <a:latin typeface="Arial"/>
+            </a:endParaRPr>
+          </a:p>
+        </p:txBody>
+      </p:sp>
+      <p:sp>
+        <p:nvSpPr>
+          <p:cNvPr id="10" name="shape"/>
           <p:cNvSpPr txBox="1"/>
           <p:nvPr/>
         </p:nvSpPr>
@@ -1559,41 +1296,32 @@
             <a:avLst/>
           </a:prstGeom>
           <a:solidFill>
-            <a:schemeClr val="accent1"/>
+            <a:srgbClr val="729fcf"/>
           </a:solidFill>
-          <a:ln w="38160">
+          <a:ln w="0">
             <a:solidFill>
-              <a:schemeClr val="accent1">
-                <a:lumMod val="75000"/>
-                <a:lumOff val="0"/>
-              </a:schemeClr>
+              <a:srgbClr val="3465a4"/>
             </a:solidFill>
-            <a:round/>
-          </a:ln>
-        </p:spPr>
-        <p:txBody>
-          <a:bodyPr lIns="90000" tIns="45000" rIns="90000" bIns="45000" anchor="t">
-            <a:spAutoFit/>
-          </a:bodyPr>
-          <a:p>
-            <a:pPr/>
-            <a:r>
-              <a:rPr lang="en-US" sz="1800" b="0" u="none" strike="noStrike">
-                <a:solidFill>
-                  <a:srgbClr val="FFFFFF"/>
-                </a:solidFill>
-                <a:effectLst/>
-                <a:uFillTx/>
+          </a:ln>
+        </p:spPr>
+        <p:txBody>
+          <a:bodyPr lIns="90000" rIns="90000" tIns="45000" bIns="45000" anchor="t">
+            <a:noAutofit/>
+          </a:bodyPr>
+          <a:p>
+            <a:r>
+              <a:rPr b="0" lang="en-US" sz="1800" spc="-1" strike="noStrike">
+                <a:solidFill>
+                  <a:srgbClr val="000000"/>
+                </a:solidFill>
                 <a:latin typeface="Arial"/>
               </a:rPr>
               <a:t>Order marker 02</a:t>
             </a:r>
-            <a:endParaRPr lang="en-US" sz="1800" b="0" u="none" strike="noStrike">
-              <a:solidFill>
-                <a:srgbClr val="FFFFFF"/>
-              </a:solidFill>
-              <a:effectLst/>
-              <a:uFillTx/>
+            <a:endParaRPr b="0" lang="en-US" sz="1800" spc="-1" strike="noStrike">
+              <a:solidFill>
+                <a:srgbClr val="000000"/>
+              </a:solidFill>
               <a:latin typeface="Arial"/>
             </a:endParaRPr>
           </a:p>
@@ -1631,7 +1359,7 @@
       </p:grpSpPr>
       <p:sp>
         <p:nvSpPr>
-          <p:cNvPr id="13" name="title"/>
+          <p:cNvPr id="11" name="title"/>
           <p:cNvSpPr txBox="1"/>
           <p:nvPr/>
         </p:nvSpPr>
@@ -1644,41 +1372,36 @@
             <a:avLst/>
           </a:prstGeom>
           <a:noFill/>
-          <a:ln w="38160">
+          <a:ln w="0">
             <a:noFill/>
           </a:ln>
         </p:spPr>
         <p:txBody>
-          <a:bodyPr lIns="90000" tIns="45000" rIns="90000" bIns="45000" anchor="t">
-            <a:spAutoFit/>
-          </a:bodyPr>
-          <a:p>
-            <a:pPr/>
-            <a:r>
-              <a:rPr lang="en-US" sz="3200" b="1" u="none" strike="noStrike">
-                <a:solidFill>
-                  <a:srgbClr val="000000"/>
-                </a:solidFill>
-                <a:effectLst/>
-                <a:uFillTx/>
+          <a:bodyPr lIns="90000" rIns="90000" tIns="45000" bIns="45000" anchor="t">
+            <a:noAutofit/>
+          </a:bodyPr>
+          <a:p>
+            <a:r>
+              <a:rPr b="1" lang="en-US" sz="3200" spc="-1" strike="noStrike">
+                <a:solidFill>
+                  <a:srgbClr val="000000"/>
+                </a:solidFill>
                 <a:latin typeface="Arial"/>
               </a:rPr>
               <a:t>Slide 10</a:t>
             </a:r>
-            <a:endParaRPr lang="en-US" sz="3200" b="0" u="none" strike="noStrike">
-              <a:solidFill>
-                <a:srgbClr val="000000"/>
-              </a:solidFill>
-              <a:effectLst/>
-              <a:uFillTx/>
-              <a:latin typeface="Arial"/>
-            </a:endParaRPr>
-          </a:p>
-        </p:txBody>
-      </p:sp>
-      <p:sp>
-        <p:nvSpPr>
-          <p:cNvPr id="14" name="shape"/>
+            <a:endParaRPr b="0" lang="en-US" sz="3200" spc="-1" strike="noStrike">
+              <a:solidFill>
+                <a:srgbClr val="000000"/>
+              </a:solidFill>
+              <a:latin typeface="Arial"/>
+            </a:endParaRPr>
+          </a:p>
+        </p:txBody>
+      </p:sp>
+      <p:sp>
+        <p:nvSpPr>
+          <p:cNvPr id="12" name="shape"/>
           <p:cNvSpPr txBox="1"/>
           <p:nvPr/>
         </p:nvSpPr>
@@ -1691,41 +1414,32 @@
             <a:avLst/>
           </a:prstGeom>
           <a:solidFill>
-            <a:schemeClr val="accent1"/>
+            <a:srgbClr val="729fcf"/>
           </a:solidFill>
-          <a:ln w="38160">
+          <a:ln w="0">
             <a:solidFill>
-              <a:schemeClr val="accent1">
-                <a:lumMod val="75000"/>
-                <a:lumOff val="0"/>
-              </a:schemeClr>
+              <a:srgbClr val="3465a4"/>
             </a:solidFill>
-            <a:round/>
-          </a:ln>
-        </p:spPr>
-        <p:txBody>
-          <a:bodyPr lIns="90000" tIns="45000" rIns="90000" bIns="45000" anchor="t">
-            <a:spAutoFit/>
-          </a:bodyPr>
-          <a:p>
-            <a:pPr/>
-            <a:r>
-              <a:rPr lang="en-US" sz="1800" b="0" u="none" strike="noStrike">
-                <a:solidFill>
-                  <a:srgbClr val="FFFFFF"/>
-                </a:solidFill>
-                <a:effectLst/>
-                <a:uFillTx/>
+          </a:ln>
+        </p:spPr>
+        <p:txBody>
+          <a:bodyPr lIns="90000" rIns="90000" tIns="45000" bIns="45000" anchor="t">
+            <a:noAutofit/>
+          </a:bodyPr>
+          <a:p>
+            <a:r>
+              <a:rPr b="0" lang="en-US" sz="1800" spc="-1" strike="noStrike">
+                <a:solidFill>
+                  <a:srgbClr val="000000"/>
+                </a:solidFill>
                 <a:latin typeface="Arial"/>
               </a:rPr>
               <a:t>Order marker 10</a:t>
             </a:r>
-            <a:endParaRPr lang="en-US" sz="1800" b="0" u="none" strike="noStrike">
-              <a:solidFill>
-                <a:srgbClr val="FFFFFF"/>
-              </a:solidFill>
-              <a:effectLst/>
-              <a:uFillTx/>
+            <a:endParaRPr b="0" lang="en-US" sz="1800" spc="-1" strike="noStrike">
+              <a:solidFill>
+                <a:srgbClr val="000000"/>
+              </a:solidFill>
               <a:latin typeface="Arial"/>
             </a:endParaRPr>
           </a:p>
@@ -1763,7 +1477,7 @@
       </p:grpSpPr>
       <p:sp>
         <p:nvSpPr>
-          <p:cNvPr id="15" name="title"/>
+          <p:cNvPr id="13" name="title"/>
           <p:cNvSpPr txBox="1"/>
           <p:nvPr/>
         </p:nvSpPr>
@@ -1776,41 +1490,36 @@
             <a:avLst/>
           </a:prstGeom>
           <a:noFill/>
-          <a:ln w="38160">
+          <a:ln w="0">
             <a:noFill/>
           </a:ln>
         </p:spPr>
         <p:txBody>
-          <a:bodyPr lIns="90000" tIns="45000" rIns="90000" bIns="45000" anchor="t">
-            <a:spAutoFit/>
-          </a:bodyPr>
-          <a:p>
-            <a:pPr/>
-            <a:r>
-              <a:rPr lang="en-US" sz="3200" b="1" u="none" strike="noStrike">
-                <a:solidFill>
-                  <a:srgbClr val="000000"/>
-                </a:solidFill>
-                <a:effectLst/>
-                <a:uFillTx/>
+          <a:bodyPr lIns="90000" rIns="90000" tIns="45000" bIns="45000" anchor="t">
+            <a:noAutofit/>
+          </a:bodyPr>
+          <a:p>
+            <a:r>
+              <a:rPr b="1" lang="en-US" sz="3200" spc="-1" strike="noStrike">
+                <a:solidFill>
+                  <a:srgbClr val="000000"/>
+                </a:solidFill>
                 <a:latin typeface="Arial"/>
               </a:rPr>
               <a:t>Slide 11</a:t>
             </a:r>
-            <a:endParaRPr lang="en-US" sz="3200" b="0" u="none" strike="noStrike">
-              <a:solidFill>
-                <a:srgbClr val="000000"/>
-              </a:solidFill>
-              <a:effectLst/>
-              <a:uFillTx/>
-              <a:latin typeface="Arial"/>
-            </a:endParaRPr>
-          </a:p>
-        </p:txBody>
-      </p:sp>
-      <p:sp>
-        <p:nvSpPr>
-          <p:cNvPr id="16" name="shape"/>
+            <a:endParaRPr b="0" lang="en-US" sz="3200" spc="-1" strike="noStrike">
+              <a:solidFill>
+                <a:srgbClr val="000000"/>
+              </a:solidFill>
+              <a:latin typeface="Arial"/>
+            </a:endParaRPr>
+          </a:p>
+        </p:txBody>
+      </p:sp>
+      <p:sp>
+        <p:nvSpPr>
+          <p:cNvPr id="14" name="shape"/>
           <p:cNvSpPr txBox="1"/>
           <p:nvPr/>
         </p:nvSpPr>
@@ -1823,41 +1532,32 @@
             <a:avLst/>
           </a:prstGeom>
           <a:solidFill>
-            <a:schemeClr val="accent1"/>
+            <a:srgbClr val="729fcf"/>
           </a:solidFill>
-          <a:ln w="38160">
+          <a:ln w="0">
             <a:solidFill>
-              <a:schemeClr val="accent1">
-                <a:lumMod val="75000"/>
-                <a:lumOff val="0"/>
-              </a:schemeClr>
+              <a:srgbClr val="3465a4"/>
             </a:solidFill>
-            <a:round/>
-          </a:ln>
-        </p:spPr>
-        <p:txBody>
-          <a:bodyPr lIns="90000" tIns="45000" rIns="90000" bIns="45000" anchor="t">
-            <a:spAutoFit/>
-          </a:bodyPr>
-          <a:p>
-            <a:pPr/>
-            <a:r>
-              <a:rPr lang="en-US" sz="1800" b="0" u="none" strike="noStrike">
-                <a:solidFill>
-                  <a:srgbClr val="FFFFFF"/>
-                </a:solidFill>
-                <a:effectLst/>
-                <a:uFillTx/>
+          </a:ln>
+        </p:spPr>
+        <p:txBody>
+          <a:bodyPr lIns="90000" rIns="90000" tIns="45000" bIns="45000" anchor="t">
+            <a:noAutofit/>
+          </a:bodyPr>
+          <a:p>
+            <a:r>
+              <a:rPr b="0" lang="en-US" sz="1800" spc="-1" strike="noStrike">
+                <a:solidFill>
+                  <a:srgbClr val="000000"/>
+                </a:solidFill>
                 <a:latin typeface="Arial"/>
               </a:rPr>
               <a:t>Order marker 11</a:t>
             </a:r>
-            <a:endParaRPr lang="en-US" sz="1800" b="0" u="none" strike="noStrike">
-              <a:solidFill>
-                <a:srgbClr val="FFFFFF"/>
-              </a:solidFill>
-              <a:effectLst/>
-              <a:uFillTx/>
+            <a:endParaRPr b="0" lang="en-US" sz="1800" spc="-1" strike="noStrike">
+              <a:solidFill>
+                <a:srgbClr val="000000"/>
+              </a:solidFill>
               <a:latin typeface="Arial"/>
             </a:endParaRPr>
           </a:p>
@@ -1895,7 +1595,7 @@
       </p:grpSpPr>
       <p:sp>
         <p:nvSpPr>
-          <p:cNvPr id="17" name="title"/>
+          <p:cNvPr id="15" name="title"/>
           <p:cNvSpPr txBox="1"/>
           <p:nvPr/>
         </p:nvSpPr>
@@ -1908,41 +1608,36 @@
             <a:avLst/>
           </a:prstGeom>
           <a:noFill/>
-          <a:ln w="38160">
+          <a:ln w="0">
             <a:noFill/>
           </a:ln>
         </p:spPr>
         <p:txBody>
-          <a:bodyPr lIns="90000" tIns="45000" rIns="90000" bIns="45000" anchor="t">
-            <a:spAutoFit/>
-          </a:bodyPr>
-          <a:p>
-            <a:pPr/>
-            <a:r>
-              <a:rPr lang="en-US" sz="3200" b="1" u="none" strike="noStrike">
-                <a:solidFill>
-                  <a:srgbClr val="000000"/>
-                </a:solidFill>
-                <a:effectLst/>
-                <a:uFillTx/>
+          <a:bodyPr lIns="90000" rIns="90000" tIns="45000" bIns="45000" anchor="t">
+            <a:noAutofit/>
+          </a:bodyPr>
+          <a:p>
+            <a:r>
+              <a:rPr b="1" lang="en-US" sz="3200" spc="-1" strike="noStrike">
+                <a:solidFill>
+                  <a:srgbClr val="000000"/>
+                </a:solidFill>
                 <a:latin typeface="Arial"/>
               </a:rPr>
               <a:t>Slide 03</a:t>
             </a:r>
-            <a:endParaRPr lang="en-US" sz="3200" b="0" u="none" strike="noStrike">
-              <a:solidFill>
-                <a:srgbClr val="000000"/>
-              </a:solidFill>
-              <a:effectLst/>
-              <a:uFillTx/>
-              <a:latin typeface="Arial"/>
-            </a:endParaRPr>
-          </a:p>
-        </p:txBody>
-      </p:sp>
-      <p:sp>
-        <p:nvSpPr>
-          <p:cNvPr id="18" name="shape"/>
+            <a:endParaRPr b="0" lang="en-US" sz="3200" spc="-1" strike="noStrike">
+              <a:solidFill>
+                <a:srgbClr val="000000"/>
+              </a:solidFill>
+              <a:latin typeface="Arial"/>
+            </a:endParaRPr>
+          </a:p>
+        </p:txBody>
+      </p:sp>
+      <p:sp>
+        <p:nvSpPr>
+          <p:cNvPr id="16" name="shape"/>
           <p:cNvSpPr txBox="1"/>
           <p:nvPr/>
         </p:nvSpPr>
@@ -1955,41 +1650,32 @@
             <a:avLst/>
           </a:prstGeom>
           <a:solidFill>
-            <a:schemeClr val="accent1"/>
+            <a:srgbClr val="729fcf"/>
           </a:solidFill>
-          <a:ln w="38160">
+          <a:ln w="0">
             <a:solidFill>
-              <a:schemeClr val="accent1">
-                <a:lumMod val="75000"/>
-                <a:lumOff val="0"/>
-              </a:schemeClr>
+              <a:srgbClr val="3465a4"/>
             </a:solidFill>
-            <a:round/>
-          </a:ln>
-        </p:spPr>
-        <p:txBody>
-          <a:bodyPr lIns="90000" tIns="45000" rIns="90000" bIns="45000" anchor="t">
-            <a:spAutoFit/>
-          </a:bodyPr>
-          <a:p>
-            <a:pPr/>
-            <a:r>
-              <a:rPr lang="en-US" sz="1800" b="0" u="none" strike="noStrike">
-                <a:solidFill>
-                  <a:srgbClr val="FFFFFF"/>
-                </a:solidFill>
-                <a:effectLst/>
-                <a:uFillTx/>
+          </a:ln>
+        </p:spPr>
+        <p:txBody>
+          <a:bodyPr lIns="90000" rIns="90000" tIns="45000" bIns="45000" anchor="t">
+            <a:noAutofit/>
+          </a:bodyPr>
+          <a:p>
+            <a:r>
+              <a:rPr b="0" lang="en-US" sz="1800" spc="-1" strike="noStrike">
+                <a:solidFill>
+                  <a:srgbClr val="000000"/>
+                </a:solidFill>
                 <a:latin typeface="Arial"/>
               </a:rPr>
               <a:t>Order marker 03</a:t>
             </a:r>
-            <a:endParaRPr lang="en-US" sz="1800" b="0" u="none" strike="noStrike">
-              <a:solidFill>
-                <a:srgbClr val="FFFFFF"/>
-              </a:solidFill>
-              <a:effectLst/>
-              <a:uFillTx/>
+            <a:endParaRPr b="0" lang="en-US" sz="1800" spc="-1" strike="noStrike">
+              <a:solidFill>
+                <a:srgbClr val="000000"/>
+              </a:solidFill>
               <a:latin typeface="Arial"/>
             </a:endParaRPr>
           </a:p>
@@ -2027,7 +1713,7 @@
       </p:grpSpPr>
       <p:sp>
         <p:nvSpPr>
-          <p:cNvPr id="19" name="title"/>
+          <p:cNvPr id="17" name="title"/>
           <p:cNvSpPr txBox="1"/>
           <p:nvPr/>
         </p:nvSpPr>
@@ -2040,41 +1726,36 @@
             <a:avLst/>
           </a:prstGeom>
           <a:noFill/>
-          <a:ln w="38160">
+          <a:ln w="0">
             <a:noFill/>
           </a:ln>
         </p:spPr>
         <p:txBody>
-          <a:bodyPr lIns="90000" tIns="45000" rIns="90000" bIns="45000" anchor="t">
-            <a:spAutoFit/>
-          </a:bodyPr>
-          <a:p>
-            <a:pPr/>
-            <a:r>
-              <a:rPr lang="en-US" sz="3200" b="1" u="none" strike="noStrike">
-                <a:solidFill>
-                  <a:srgbClr val="000000"/>
-                </a:solidFill>
-                <a:effectLst/>
-                <a:uFillTx/>
+          <a:bodyPr lIns="90000" rIns="90000" tIns="45000" bIns="45000" anchor="t">
+            <a:noAutofit/>
+          </a:bodyPr>
+          <a:p>
+            <a:r>
+              <a:rPr b="1" lang="en-US" sz="3200" spc="-1" strike="noStrike">
+                <a:solidFill>
+                  <a:srgbClr val="000000"/>
+                </a:solidFill>
                 <a:latin typeface="Arial"/>
               </a:rPr>
               <a:t>Slide 04</a:t>
             </a:r>
-            <a:endParaRPr lang="en-US" sz="3200" b="0" u="none" strike="noStrike">
-              <a:solidFill>
-                <a:srgbClr val="000000"/>
-              </a:solidFill>
-              <a:effectLst/>
-              <a:uFillTx/>
-              <a:latin typeface="Arial"/>
-            </a:endParaRPr>
-          </a:p>
-        </p:txBody>
-      </p:sp>
-      <p:sp>
-        <p:nvSpPr>
-          <p:cNvPr id="20" name="shape"/>
+            <a:endParaRPr b="0" lang="en-US" sz="3200" spc="-1" strike="noStrike">
+              <a:solidFill>
+                <a:srgbClr val="000000"/>
+              </a:solidFill>
+              <a:latin typeface="Arial"/>
+            </a:endParaRPr>
+          </a:p>
+        </p:txBody>
+      </p:sp>
+      <p:sp>
+        <p:nvSpPr>
+          <p:cNvPr id="18" name="shape"/>
           <p:cNvSpPr txBox="1"/>
           <p:nvPr/>
         </p:nvSpPr>
@@ -2087,41 +1768,32 @@
             <a:avLst/>
           </a:prstGeom>
           <a:solidFill>
-            <a:schemeClr val="accent1"/>
+            <a:srgbClr val="729fcf"/>
           </a:solidFill>
-          <a:ln w="38160">
+          <a:ln w="0">
             <a:solidFill>
-              <a:schemeClr val="accent1">
-                <a:lumMod val="75000"/>
-                <a:lumOff val="0"/>
-              </a:schemeClr>
+              <a:srgbClr val="3465a4"/>
             </a:solidFill>
-            <a:round/>
-          </a:ln>
-        </p:spPr>
-        <p:txBody>
-          <a:bodyPr lIns="90000" tIns="45000" rIns="90000" bIns="45000" anchor="t">
-            <a:spAutoFit/>
-          </a:bodyPr>
-          <a:p>
-            <a:pPr/>
-            <a:r>
-              <a:rPr lang="en-US" sz="1800" b="0" u="none" strike="noStrike">
-                <a:solidFill>
-                  <a:srgbClr val="FFFFFF"/>
-                </a:solidFill>
-                <a:effectLst/>
-                <a:uFillTx/>
+          </a:ln>
+        </p:spPr>
+        <p:txBody>
+          <a:bodyPr lIns="90000" rIns="90000" tIns="45000" bIns="45000" anchor="t">
+            <a:noAutofit/>
+          </a:bodyPr>
+          <a:p>
+            <a:r>
+              <a:rPr b="0" lang="en-US" sz="1800" spc="-1" strike="noStrike">
+                <a:solidFill>
+                  <a:srgbClr val="000000"/>
+                </a:solidFill>
                 <a:latin typeface="Arial"/>
               </a:rPr>
               <a:t>Order marker 04</a:t>
             </a:r>
-            <a:endParaRPr lang="en-US" sz="1800" b="0" u="none" strike="noStrike">
-              <a:solidFill>
-                <a:srgbClr val="FFFFFF"/>
-              </a:solidFill>
-              <a:effectLst/>
-              <a:uFillTx/>
+            <a:endParaRPr b="0" lang="en-US" sz="1800" spc="-1" strike="noStrike">
+              <a:solidFill>
+                <a:srgbClr val="000000"/>
+              </a:solidFill>
               <a:latin typeface="Arial"/>
             </a:endParaRPr>
           </a:p>
@@ -2159,7 +1831,7 @@
       </p:grpSpPr>
       <p:sp>
         <p:nvSpPr>
-          <p:cNvPr id="21" name="title"/>
+          <p:cNvPr id="19" name="title"/>
           <p:cNvSpPr txBox="1"/>
           <p:nvPr/>
         </p:nvSpPr>
@@ -2172,41 +1844,36 @@
             <a:avLst/>
           </a:prstGeom>
           <a:noFill/>
-          <a:ln w="38160">
+          <a:ln w="0">
             <a:noFill/>
           </a:ln>
         </p:spPr>
         <p:txBody>
-          <a:bodyPr lIns="90000" tIns="45000" rIns="90000" bIns="45000" anchor="t">
-            <a:spAutoFit/>
-          </a:bodyPr>
-          <a:p>
-            <a:pPr/>
-            <a:r>
-              <a:rPr lang="en-US" sz="3200" b="1" u="none" strike="noStrike">
-                <a:solidFill>
-                  <a:srgbClr val="000000"/>
-                </a:solidFill>
-                <a:effectLst/>
-                <a:uFillTx/>
+          <a:bodyPr lIns="90000" rIns="90000" tIns="45000" bIns="45000" anchor="t">
+            <a:noAutofit/>
+          </a:bodyPr>
+          <a:p>
+            <a:r>
+              <a:rPr b="1" lang="en-US" sz="3200" spc="-1" strike="noStrike">
+                <a:solidFill>
+                  <a:srgbClr val="000000"/>
+                </a:solidFill>
                 <a:latin typeface="Arial"/>
               </a:rPr>
               <a:t>Slide 05</a:t>
             </a:r>
-            <a:endParaRPr lang="en-US" sz="3200" b="0" u="none" strike="noStrike">
-              <a:solidFill>
-                <a:srgbClr val="000000"/>
-              </a:solidFill>
-              <a:effectLst/>
-              <a:uFillTx/>
-              <a:latin typeface="Arial"/>
-            </a:endParaRPr>
-          </a:p>
-        </p:txBody>
-      </p:sp>
-      <p:sp>
-        <p:nvSpPr>
-          <p:cNvPr id="22" name="shape"/>
+            <a:endParaRPr b="0" lang="en-US" sz="3200" spc="-1" strike="noStrike">
+              <a:solidFill>
+                <a:srgbClr val="000000"/>
+              </a:solidFill>
+              <a:latin typeface="Arial"/>
+            </a:endParaRPr>
+          </a:p>
+        </p:txBody>
+      </p:sp>
+      <p:sp>
+        <p:nvSpPr>
+          <p:cNvPr id="20" name="shape"/>
           <p:cNvSpPr txBox="1"/>
           <p:nvPr/>
         </p:nvSpPr>
@@ -2219,41 +1886,32 @@
             <a:avLst/>
           </a:prstGeom>
           <a:solidFill>
-            <a:schemeClr val="accent1"/>
+            <a:srgbClr val="729fcf"/>
           </a:solidFill>
-          <a:ln w="38160">
+          <a:ln w="0">
             <a:solidFill>
-              <a:schemeClr val="accent1">
-                <a:lumMod val="75000"/>
-                <a:lumOff val="0"/>
-              </a:schemeClr>
+              <a:srgbClr val="3465a4"/>
             </a:solidFill>
-            <a:round/>
-          </a:ln>
-        </p:spPr>
-        <p:txBody>
-          <a:bodyPr lIns="90000" tIns="45000" rIns="90000" bIns="45000" anchor="t">
-            <a:spAutoFit/>
-          </a:bodyPr>
-          <a:p>
-            <a:pPr/>
-            <a:r>
-              <a:rPr lang="en-US" sz="1800" b="0" u="none" strike="noStrike">
-                <a:solidFill>
-                  <a:srgbClr val="FFFFFF"/>
-                </a:solidFill>
-                <a:effectLst/>
-                <a:uFillTx/>
+          </a:ln>
+        </p:spPr>
+        <p:txBody>
+          <a:bodyPr lIns="90000" rIns="90000" tIns="45000" bIns="45000" anchor="t">
+            <a:noAutofit/>
+          </a:bodyPr>
+          <a:p>
+            <a:r>
+              <a:rPr b="0" lang="en-US" sz="1800" spc="-1" strike="noStrike">
+                <a:solidFill>
+                  <a:srgbClr val="000000"/>
+                </a:solidFill>
                 <a:latin typeface="Arial"/>
               </a:rPr>
               <a:t>Order marker 05</a:t>
             </a:r>
-            <a:endParaRPr lang="en-US" sz="1800" b="0" u="none" strike="noStrike">
-              <a:solidFill>
-                <a:srgbClr val="FFFFFF"/>
-              </a:solidFill>
-              <a:effectLst/>
-              <a:uFillTx/>
+            <a:endParaRPr b="0" lang="en-US" sz="1800" spc="-1" strike="noStrike">
+              <a:solidFill>
+                <a:srgbClr val="000000"/>
+              </a:solidFill>
               <a:latin typeface="Arial"/>
             </a:endParaRPr>
           </a:p>
@@ -2291,7 +1949,7 @@
       </p:grpSpPr>
       <p:sp>
         <p:nvSpPr>
-          <p:cNvPr id="23" name="title"/>
+          <p:cNvPr id="21" name="title"/>
           <p:cNvSpPr txBox="1"/>
           <p:nvPr/>
         </p:nvSpPr>
@@ -2304,41 +1962,36 @@
             <a:avLst/>
           </a:prstGeom>
           <a:noFill/>
-          <a:ln w="38160">
+          <a:ln w="0">
             <a:noFill/>
           </a:ln>
         </p:spPr>
         <p:txBody>
-          <a:bodyPr lIns="90000" tIns="45000" rIns="90000" bIns="45000" anchor="t">
-            <a:spAutoFit/>
-          </a:bodyPr>
-          <a:p>
-            <a:pPr/>
-            <a:r>
-              <a:rPr lang="en-US" sz="3200" b="1" u="none" strike="noStrike">
-                <a:solidFill>
-                  <a:srgbClr val="000000"/>
-                </a:solidFill>
-                <a:effectLst/>
-                <a:uFillTx/>
+          <a:bodyPr lIns="90000" rIns="90000" tIns="45000" bIns="45000" anchor="t">
+            <a:noAutofit/>
+          </a:bodyPr>
+          <a:p>
+            <a:r>
+              <a:rPr b="1" lang="en-US" sz="3200" spc="-1" strike="noStrike">
+                <a:solidFill>
+                  <a:srgbClr val="000000"/>
+                </a:solidFill>
                 <a:latin typeface="Arial"/>
               </a:rPr>
               <a:t>Slide 06</a:t>
             </a:r>
-            <a:endParaRPr lang="en-US" sz="3200" b="0" u="none" strike="noStrike">
-              <a:solidFill>
-                <a:srgbClr val="000000"/>
-              </a:solidFill>
-              <a:effectLst/>
-              <a:uFillTx/>
-              <a:latin typeface="Arial"/>
-            </a:endParaRPr>
-          </a:p>
-        </p:txBody>
-      </p:sp>
-      <p:sp>
-        <p:nvSpPr>
-          <p:cNvPr id="24" name="shape"/>
+            <a:endParaRPr b="0" lang="en-US" sz="3200" spc="-1" strike="noStrike">
+              <a:solidFill>
+                <a:srgbClr val="000000"/>
+              </a:solidFill>
+              <a:latin typeface="Arial"/>
+            </a:endParaRPr>
+          </a:p>
+        </p:txBody>
+      </p:sp>
+      <p:sp>
+        <p:nvSpPr>
+          <p:cNvPr id="22" name="shape"/>
           <p:cNvSpPr txBox="1"/>
           <p:nvPr/>
         </p:nvSpPr>
@@ -2351,41 +2004,32 @@
             <a:avLst/>
           </a:prstGeom>
           <a:solidFill>
-            <a:schemeClr val="accent1"/>
+            <a:srgbClr val="729fcf"/>
           </a:solidFill>
-          <a:ln w="38160">
+          <a:ln w="0">
             <a:solidFill>
-              <a:schemeClr val="accent1">
-                <a:lumMod val="75000"/>
-                <a:lumOff val="0"/>
-              </a:schemeClr>
+              <a:srgbClr val="3465a4"/>
             </a:solidFill>
-            <a:round/>
-          </a:ln>
-        </p:spPr>
-        <p:txBody>
-          <a:bodyPr lIns="90000" tIns="45000" rIns="90000" bIns="45000" anchor="t">
-            <a:spAutoFit/>
-          </a:bodyPr>
-          <a:p>
-            <a:pPr/>
-            <a:r>
-              <a:rPr lang="en-US" sz="1800" b="0" u="none" strike="noStrike">
-                <a:solidFill>
-                  <a:srgbClr val="FFFFFF"/>
-                </a:solidFill>
-                <a:effectLst/>
-                <a:uFillTx/>
+          </a:ln>
+        </p:spPr>
+        <p:txBody>
+          <a:bodyPr lIns="90000" rIns="90000" tIns="45000" bIns="45000" anchor="t">
+            <a:noAutofit/>
+          </a:bodyPr>
+          <a:p>
+            <a:r>
+              <a:rPr b="0" lang="en-US" sz="1800" spc="-1" strike="noStrike">
+                <a:solidFill>
+                  <a:srgbClr val="000000"/>
+                </a:solidFill>
                 <a:latin typeface="Arial"/>
               </a:rPr>
               <a:t>Order marker 06</a:t>
             </a:r>
-            <a:endParaRPr lang="en-US" sz="1800" b="0" u="none" strike="noStrike">
-              <a:solidFill>
-                <a:srgbClr val="FFFFFF"/>
-              </a:solidFill>
-              <a:effectLst/>
-              <a:uFillTx/>
+            <a:endParaRPr b="0" lang="en-US" sz="1800" spc="-1" strike="noStrike">
+              <a:solidFill>
+                <a:srgbClr val="000000"/>
+              </a:solidFill>
               <a:latin typeface="Arial"/>
             </a:endParaRPr>
           </a:p>
@@ -2423,7 +2067,7 @@
       </p:grpSpPr>
       <p:sp>
         <p:nvSpPr>
-          <p:cNvPr id="25" name="title"/>
+          <p:cNvPr id="23" name="title"/>
           <p:cNvSpPr txBox="1"/>
           <p:nvPr/>
         </p:nvSpPr>
@@ -2436,41 +2080,36 @@
             <a:avLst/>
           </a:prstGeom>
           <a:noFill/>
-          <a:ln w="38160">
+          <a:ln w="0">
             <a:noFill/>
           </a:ln>
         </p:spPr>
         <p:txBody>
-          <a:bodyPr lIns="90000" tIns="45000" rIns="90000" bIns="45000" anchor="t">
-            <a:spAutoFit/>
-          </a:bodyPr>
-          <a:p>
-            <a:pPr/>
-            <a:r>
-              <a:rPr lang="en-US" sz="3200" b="1" u="none" strike="noStrike">
-                <a:solidFill>
-                  <a:srgbClr val="000000"/>
-                </a:solidFill>
-                <a:effectLst/>
-                <a:uFillTx/>
+          <a:bodyPr lIns="90000" rIns="90000" tIns="45000" bIns="45000" anchor="t">
+            <a:noAutofit/>
+          </a:bodyPr>
+          <a:p>
+            <a:r>
+              <a:rPr b="1" lang="en-US" sz="3200" spc="-1" strike="noStrike">
+                <a:solidFill>
+                  <a:srgbClr val="000000"/>
+                </a:solidFill>
                 <a:latin typeface="Arial"/>
               </a:rPr>
               <a:t>Slide 07</a:t>
             </a:r>
-            <a:endParaRPr lang="en-US" sz="3200" b="0" u="none" strike="noStrike">
-              <a:solidFill>
-                <a:srgbClr val="000000"/>
-              </a:solidFill>
-              <a:effectLst/>
-              <a:uFillTx/>
-              <a:latin typeface="Arial"/>
-            </a:endParaRPr>
-          </a:p>
-        </p:txBody>
-      </p:sp>
-      <p:sp>
-        <p:nvSpPr>
-          <p:cNvPr id="26" name="shape"/>
+            <a:endParaRPr b="0" lang="en-US" sz="3200" spc="-1" strike="noStrike">
+              <a:solidFill>
+                <a:srgbClr val="000000"/>
+              </a:solidFill>
+              <a:latin typeface="Arial"/>
+            </a:endParaRPr>
+          </a:p>
+        </p:txBody>
+      </p:sp>
+      <p:sp>
+        <p:nvSpPr>
+          <p:cNvPr id="24" name="shape"/>
           <p:cNvSpPr txBox="1"/>
           <p:nvPr/>
         </p:nvSpPr>
@@ -2483,41 +2122,32 @@
             <a:avLst/>
           </a:prstGeom>
           <a:solidFill>
-            <a:schemeClr val="accent1"/>
+            <a:srgbClr val="729fcf"/>
           </a:solidFill>
-          <a:ln w="38160">
+          <a:ln w="0">
             <a:solidFill>
-              <a:schemeClr val="accent1">
-                <a:lumMod val="75000"/>
-                <a:lumOff val="0"/>
-              </a:schemeClr>
+              <a:srgbClr val="3465a4"/>
             </a:solidFill>
-            <a:round/>
-          </a:ln>
-        </p:spPr>
-        <p:txBody>
-          <a:bodyPr lIns="90000" tIns="45000" rIns="90000" bIns="45000" anchor="t">
-            <a:spAutoFit/>
-          </a:bodyPr>
-          <a:p>
-            <a:pPr/>
-            <a:r>
-              <a:rPr lang="en-US" sz="1800" b="0" u="none" strike="noStrike">
-                <a:solidFill>
-                  <a:srgbClr val="FFFFFF"/>
-                </a:solidFill>
-                <a:effectLst/>
-                <a:uFillTx/>
+          </a:ln>
+        </p:spPr>
+        <p:txBody>
+          <a:bodyPr lIns="90000" rIns="90000" tIns="45000" bIns="45000" anchor="t">
+            <a:noAutofit/>
+          </a:bodyPr>
+          <a:p>
+            <a:r>
+              <a:rPr b="0" lang="en-US" sz="1800" spc="-1" strike="noStrike">
+                <a:solidFill>
+                  <a:srgbClr val="000000"/>
+                </a:solidFill>
                 <a:latin typeface="Arial"/>
               </a:rPr>
               <a:t>Order marker 07</a:t>
             </a:r>
-            <a:endParaRPr lang="en-US" sz="1800" b="0" u="none" strike="noStrike">
-              <a:solidFill>
-                <a:srgbClr val="FFFFFF"/>
-              </a:solidFill>
-              <a:effectLst/>
-              <a:uFillTx/>
+            <a:endParaRPr b="0" lang="en-US" sz="1800" spc="-1" strike="noStrike">
+              <a:solidFill>
+                <a:srgbClr val="000000"/>
+              </a:solidFill>
               <a:latin typeface="Arial"/>
             </a:endParaRPr>
           </a:p>
@@ -2544,37 +2174,37 @@
         <a:srgbClr val="000000"/>
       </a:dk1>
       <a:lt1>
-        <a:srgbClr val="FFFFFF"/>
+        <a:srgbClr val="ffffff"/>
       </a:lt1>
       <a:dk2>
         <a:srgbClr val="000000"/>
       </a:dk2>
       <a:lt2>
-        <a:srgbClr val="FFFFFF"/>
+        <a:srgbClr val="ffffff"/>
       </a:lt2>
       <a:accent1>
-        <a:srgbClr val="18A303"/>
+        <a:srgbClr val="18a303"/>
       </a:accent1>
       <a:accent2>
-        <a:srgbClr val="0369A3"/>
+        <a:srgbClr val="0369a3"/>
       </a:accent2>
       <a:accent3>
-        <a:srgbClr val="A33E03"/>
+        <a:srgbClr val="a33e03"/>
       </a:accent3>
       <a:accent4>
-        <a:srgbClr val="8E03A3"/>
+        <a:srgbClr val="8e03a3"/>
       </a:accent4>
       <a:accent5>
-        <a:srgbClr val="C99C00"/>
+        <a:srgbClr val="c99c00"/>
       </a:accent5>
       <a:accent6>
-        <a:srgbClr val="C9211E"/>
+        <a:srgbClr val="c9211e"/>
       </a:accent6>
       <a:hlink>
-        <a:srgbClr val="0000EE"/>
+        <a:srgbClr val="0000ee"/>
       </a:hlink>
       <a:folHlink>
-        <a:srgbClr val="551A8B"/>
+        <a:srgbClr val="551a8b"/>
       </a:folHlink>
     </a:clrScheme>
     <a:fontScheme name="Office">
